--- a/docs/user-manual/02-hod.pptx
+++ b/docs/user-manual/02-hod.pptx
@@ -3490,7 +3490,7 @@
                   <a:srgbClr val="8AB4D8"/>
                 </a:solidFill>
               </a:rPr>
-              <a:t>Version:  </a:t>
+              <a:t>Target turnaround:  </a:t>
             </a:r>
             <a:r>
               <a:rPr sz="1100">
@@ -3498,7 +3498,7 @@
                   <a:srgbClr val="D0E3F2"/>
                 </a:solidFill>
               </a:rPr>
-              <a:t>1.0</a:t>
+              <a:t>48 hours for PRs; same day for Petty Cash</a:t>
             </a:r>
           </a:p>
         </p:txBody>
@@ -4196,7 +4196,40 @@
                 </a:solidFill>
                 <a:latin typeface="Consolas"/>
               </a:rPr>
-              <a:t>                 (initiator sees comment + can resubmit)</a:t>
+              <a:t> (Finance reviews;  (initiator sees comment)</a:t>
+            </a:r>
+          </a:p>
+          <a:p>
+            <a:r>
+              <a:rPr sz="1200">
+                <a:solidFill>
+                  <a:srgbClr val="111111"/>
+                </a:solidFill>
+                <a:latin typeface="Consolas"/>
+              </a:rPr>
+              <a:t>  Procurement gains</a:t>
+            </a:r>
+          </a:p>
+          <a:p>
+            <a:r>
+              <a:rPr sz="1200">
+                <a:solidFill>
+                  <a:srgbClr val="111111"/>
+                </a:solidFill>
+                <a:latin typeface="Consolas"/>
+              </a:rPr>
+              <a:t>  read-only visibility</a:t>
+            </a:r>
+          </a:p>
+          <a:p>
+            <a:r>
+              <a:rPr sz="1200">
+                <a:solidFill>
+                  <a:srgbClr val="111111"/>
+                </a:solidFill>
+                <a:latin typeface="Consolas"/>
+              </a:rPr>
+              <a:t>  via Incoming PRs)</a:t>
             </a:r>
           </a:p>
         </p:txBody>
@@ -5028,7 +5061,22 @@
                   <a:srgbClr val="111111"/>
                 </a:solidFill>
               </a:rPr>
-              <a:t>Finance receives an email</a:t>
+              <a:t>Finance is notified by email</a:t>
+            </a:r>
+          </a:p>
+          <a:p>
+            <a:pPr>
+              <a:spcBef>
+                <a:spcPts val="300"/>
+              </a:spcBef>
+            </a:pPr>
+            <a:r>
+              <a:rPr sz="1300">
+                <a:solidFill>
+                  <a:srgbClr val="111111"/>
+                </a:solidFill>
+              </a:rPr>
+              <a:t>Procurement gains read-only view of the PR immediately</a:t>
             </a:r>
           </a:p>
           <a:p>
